--- a/lecons/F4/14_F4_M1_L14_The_Drainage_of_Cameroon.pptx
+++ b/lecons/F4/14_F4_M1_L14_The_Drainage_of_Cameroon.pptx
@@ -3280,7 +3280,7 @@
           <a:p>
             <a:r>
               <a:rPr lang="en-US" dirty="0"/>
-              <a:t>Let us copy Main Drainage Characteristics. The rivers of Cameroon have the following characteristics. On this slide we have Watersheds and Regime. Write each point on a new line, with the key term first, and explain it in your own words when we revise. When you finish, we go to the next slide.</a:t>
+              <a:t>Let us copy Main Drainage Characteristics. The characteristics and uses of the rivers of Cameroon are the following. On this slide we have Watersheds and Regime. Write each point on a new line, with the key term first, and explain it in your own words when we revise. When you finish, we go to the next slide.</a:t>
             </a:r>
             <a:endParaRPr lang="en-US" dirty="0"/>
           </a:p>
@@ -14364,7 +14364,7 @@
                 <a:ea typeface="Times New Roman" pitchFamily="34" charset="-122"/>
                 <a:cs typeface="Times New Roman" pitchFamily="34" charset="-120"/>
               </a:rPr>
-              <a:t>The rivers of Cameroon have the following characteristics:</a:t>
+              <a:t>The characteristics and uses of the rivers of Cameroon are the following:</a:t>
             </a:r>
             <a:endParaRPr lang="en-US" sz="4000" dirty="0"/>
           </a:p>

--- a/lecons/F4/14_F4_M1_L14_The_Drainage_of_Cameroon.pptx
+++ b/lecons/F4/14_F4_M1_L14_The_Drainage_of_Cameroon.pptx
@@ -3280,7 +3280,7 @@
           <a:p>
             <a:r>
               <a:rPr lang="en-US" dirty="0"/>
-              <a:t>Let us copy Main Drainage Characteristics. The characteristics and uses of the rivers of Cameroon are the following. On this slide we have Watersheds and Regime. Write each point on a new line, with the key term first, and explain it in your own words when we revise. When you finish, we go to the next slide.</a:t>
+              <a:t>Let us copy Main Drainage Characteristics. The rivers of Cameroon have the following characteristics. On this slide we have Watersheds and Regime. Write each point on a new line, with the key term first, and explain it in your own words when we revise. When you finish, we go to the next slide.</a:t>
             </a:r>
             <a:endParaRPr lang="en-US" dirty="0"/>
           </a:p>
@@ -3368,7 +3368,7 @@
           <a:p>
             <a:r>
               <a:rPr lang="en-US" dirty="0"/>
-              <a:t>We continue with Main Drainage Characteristics. On this slide we have Uses. Write each point on a new line, with the key term first, and explain it in your own words when we revise.</a:t>
+              <a:t>We continue with Main Drainage Characteristics. On this slide we have Waterfalls and rapids. Write each point on a new line, with the key term first, and explain it in your own words when we revise.</a:t>
             </a:r>
             <a:endParaRPr lang="en-US" dirty="0"/>
           </a:p>
@@ -14364,7 +14364,7 @@
                 <a:ea typeface="Times New Roman" pitchFamily="34" charset="-122"/>
                 <a:cs typeface="Times New Roman" pitchFamily="34" charset="-120"/>
               </a:rPr>
-              <a:t>The characteristics and uses of the rivers of Cameroon are the following:</a:t>
+              <a:t>The rivers of Cameroon have the following characteristics:</a:t>
             </a:r>
             <a:endParaRPr lang="en-US" sz="4000" dirty="0"/>
           </a:p>
@@ -14657,7 +14657,7 @@
                 <a:ea typeface="Times New Roman" pitchFamily="34" charset="-122"/>
                 <a:cs typeface="Times New Roman" pitchFamily="34" charset="-120"/>
               </a:rPr>
-              <a:t>Uses: </a:t>
+              <a:t>Waterfalls and rapids: </a:t>
             </a:r>
             <a:pPr algn="l" indent="0" marL="0">
               <a:spcAft>
@@ -14674,7 +14674,7 @@
                 <a:ea typeface="Times New Roman" pitchFamily="34" charset="-122"/>
                 <a:cs typeface="Times New Roman" pitchFamily="34" charset="-120"/>
               </a:rPr>
-              <a:t>Waterfalls and rapids favour hydro-electricity but limit navigation.</a:t>
+              <a:t>They favour hydro-electricity but limit navigation.</a:t>
             </a:r>
             <a:endParaRPr lang="en-US" sz="4000" dirty="0"/>
           </a:p>
